--- a/03_Presentations/00_Program_Proposal.pptx
+++ b/03_Presentations/00_Program_Proposal.pptx
@@ -2,18 +2,18 @@
 <file path=ppt/presentation.xml><?xml version="1.0" encoding="utf-8"?>
 <p:presentation xmlns:p="http://schemas.openxmlformats.org/presentationml/2006/main">
   <p:sldMasterIdLst>
-    <p:sldMasterId xmlns:r="http://schemas.openxmlformats.org/officeDocument/2006/relationships" id="2147483648" r:id="R304c69f6385a4787"/>
+    <p:sldMasterId xmlns:r="http://schemas.openxmlformats.org/officeDocument/2006/relationships" id="2147483648" r:id="Re03fa22552d547fa"/>
   </p:sldMasterIdLst>
   <p:notesMasterIdLst>
-    <p:notesMasterId xmlns:r="http://schemas.openxmlformats.org/officeDocument/2006/relationships" r:id="R0bb3dabf037842c8"/>
+    <p:notesMasterId xmlns:r="http://schemas.openxmlformats.org/officeDocument/2006/relationships" r:id="R775a7a7b23b14635"/>
   </p:notesMasterIdLst>
   <p:sldIdLst>
-    <p:sldId xmlns:r="http://schemas.openxmlformats.org/officeDocument/2006/relationships" id="256" r:id="R23d0e633a598423c"/>
-    <p:sldId xmlns:r="http://schemas.openxmlformats.org/officeDocument/2006/relationships" id="257" r:id="R1f76bb8cf93a42c2"/>
-    <p:sldId xmlns:r="http://schemas.openxmlformats.org/officeDocument/2006/relationships" id="258" r:id="R3a4ae9540ff142a8"/>
-    <p:sldId xmlns:r="http://schemas.openxmlformats.org/officeDocument/2006/relationships" id="259" r:id="R8cea58ee6cb54069"/>
-    <p:sldId xmlns:r="http://schemas.openxmlformats.org/officeDocument/2006/relationships" id="260" r:id="Rb50b265a5f5041bd"/>
-    <p:sldId xmlns:r="http://schemas.openxmlformats.org/officeDocument/2006/relationships" id="261" r:id="Ra54883cb0a274f9b"/>
+    <p:sldId xmlns:r="http://schemas.openxmlformats.org/officeDocument/2006/relationships" id="256" r:id="Rbb3b0c7f57744ba3"/>
+    <p:sldId xmlns:r="http://schemas.openxmlformats.org/officeDocument/2006/relationships" id="257" r:id="Rc7fd0ae6a3aa4cdd"/>
+    <p:sldId xmlns:r="http://schemas.openxmlformats.org/officeDocument/2006/relationships" id="258" r:id="R0fdad1d014c64c49"/>
+    <p:sldId xmlns:r="http://schemas.openxmlformats.org/officeDocument/2006/relationships" id="259" r:id="Redba2e578949405a"/>
+    <p:sldId xmlns:r="http://schemas.openxmlformats.org/officeDocument/2006/relationships" id="260" r:id="Rb5f7ff8720ed47dc"/>
+    <p:sldId xmlns:r="http://schemas.openxmlformats.org/officeDocument/2006/relationships" id="261" r:id="R2f2c72125422457f"/>
   </p:sldIdLst>
   <p:sldSz cx="12192000" cy="6858000"/>
   <p:notesSz cx="6858000" cy="9144000"/>
@@ -447,7 +447,7 @@
           <a:lstStyle xmlns:a="http://schemas.openxmlformats.org/drawingml/2006/main"/>
           <a:p xmlns:a="http://schemas.openxmlformats.org/drawingml/2006/main">
             <a:r>
-              <a:t>Audience: YMCA partners and team leadership. Purpose: decide whether to launch a small pilot with existing equipment. Enrollment, devices, dates, and staffing are unconfirmed. Source: user-provided partnership context. No claim of past outcomes.</a:t>
+              <a:t>[object Object]</a:t>
             </a:r>
           </a:p>
         </p:txBody>
@@ -517,7 +517,7 @@
           <a:lstStyle xmlns:a="http://schemas.openxmlformats.org/drawingml/2006/main"/>
           <a:p xmlns:a="http://schemas.openxmlformats.org/drawingml/2006/main">
             <a:r>
-              <a:t>All quantities except the two user-reported kits are recommendations. Four laptops are preferred, two are workable with paper planning tasks. Four mentors are ideal, but one prepared mentor per kit pod is the minimum instructional recommendation. YMCA staffing requirements still govern.</a:t>
+              <a:t>Confirmed by Alex October 25: 12 children in grades 5–6, two kits, 4–6 student instructors and four available laptops. Assign two robot mentors and two build mentors; extra mentors float. Two laptops control robots and two display build references. Printed build cards support a two-laptop version. YMCA supervision requirements still govern.</a:t>
             </a:r>
           </a:p>
         </p:txBody>
@@ -587,7 +587,7 @@
           <a:lstStyle xmlns:a="http://schemas.openxmlformats.org/drawingml/2006/main"/>
           <a:p xmlns:a="http://schemas.openxmlformats.org/drawingml/2006/main">
             <a:r>
-              <a:t>The same base stays assembled. This preserves programming and testing time. Every pair gets about 17 minutes of direct kit time in the standard lesson, plus planning and discussion. Full details are in the program proposal and instructor guide.</a:t>
+              <a:t>Keep both driving bases assembled. Each week includes a related hands-on build and robot tests. Four teams share two kits. Each team receives a 12-minute turn and a six-minute retest in Weeks 1–7, with three rotating jobs. Week 8 uses six-minute rehearsals and four-minute demonstrations. See Grouping_and_Roles.md for exact timings.</a:t>
             </a:r>
           </a:p>
         </p:txBody>
@@ -657,7 +657,7 @@
           <a:lstStyle xmlns:a="http://schemas.openxmlformats.org/drawingml/2006/main"/>
           <a:p xmlns:a="http://schemas.openxmlformats.org/drawingml/2006/main">
             <a:r>
-              <a:t>These are real Python recipe lines inside supplied support code. They are not draggable Python blocks. Mentors introduce only the relevant lines, then expose loops and sensor conditions over time. Word Blocks is a planned fallback with the same learning goal. Source for supported languages and app entry point: https://education.lego.com/en-us/downloads/spike-app/software/</a:t>
+              <a:t>[object Object]</a:t>
             </a:r>
           </a:p>
         </p:txBody>
@@ -727,7 +727,7 @@
           <a:lstStyle xmlns:a="http://schemas.openxmlformats.org/drawingml/2006/main"/>
           <a:p xmlns:a="http://schemas.openxmlformats.org/drawingml/2006/main">
             <a:r>
-              <a:t>Illustrative schedule: October 21 and 28; November 4, 11, and 18; December 2, 9, and 16, 2026. Skip Thanksgiving week. Check November 11 and local closures. The kit software and lesson support continue to June 30, 2031 despite SPIKE sales retirement. Source: https://education.lego.com/en-us/spike-update-2026/</a:t>
+              <a:t>Enrollment, grade band, available mentors and devices are confirmed. Session dates, inventory and hardware readiness still need verification. The old October 21 proposal date is not an actual scheduled start. Use the per-session print-and-bring checklist, arrange two robot stations and two build tables, and test both robots before class.</a:t>
             </a:r>
           </a:p>
         </p:txBody>
@@ -797,7 +797,7 @@
           <a:lstStyle xmlns:a="http://schemas.openxmlformats.org/drawingml/2006/main"/>
           <a:p xmlns:a="http://schemas.openxmlformats.org/drawingml/2006/main">
             <a:r>
-              <a:t>Use attendance, matched concept checks, work samples, and partner feedback. Future FRC interest and actual later participation are separate outcomes. Engineering Inspiration considers measurable community STEM work. Impact considers sustained work over time. This proposed pilot is one contribution, not evidence of outcomes already achieved. Sources: https://www.firstinspires.org/resources/library/frc/team-awards and https://www.firstinspires.org/resources/library/frc/submitted-awards</a:t>
+              <a:t>[object Object]</a:t>
             </a:r>
           </a:p>
         </p:txBody>
@@ -865,7 +865,7 @@
   </p:cSld>
   <p:clrMap bg1="lt1" tx1="dk1" bg2="lt2" tx2="dk2" accent1="accent1" accent2="accent2" accent3="accent3" accent4="accent4" accent5="accent5" accent6="accent6" hlink="hlink" folHlink="folHlink"/>
   <p:sldLayoutIdLst>
-    <p:sldLayoutId xmlns:r="http://schemas.openxmlformats.org/officeDocument/2006/relationships" id="2147483649" r:id="R6afead7f03a34777"/>
+    <p:sldLayoutId xmlns:r="http://schemas.openxmlformats.org/officeDocument/2006/relationships" id="2147483649" r:id="R0fdc141b55854627"/>
   </p:sldLayoutIdLst>
   <p:txStyles>
     <p:titleStyle>
@@ -1445,6 +1445,7 @@
           <a:lstStyle xmlns:a="http://schemas.openxmlformats.org/drawingml/2006/main"/>
           <a:p xmlns:a="http://schemas.openxmlformats.org/drawingml/2006/main">
             <a:pPr>
+              <a:buNone/>
               <a:defRPr sz="5100" b="1">
                 <a:solidFill>
                   <a:srgbClr val="FFFFFF"/>
@@ -1502,6 +1503,7 @@
           <a:lstStyle xmlns:a="http://schemas.openxmlformats.org/drawingml/2006/main"/>
           <a:p xmlns:a="http://schemas.openxmlformats.org/drawingml/2006/main">
             <a:pPr>
+              <a:buNone/>
               <a:defRPr sz="2475" b="0">
                 <a:solidFill>
                   <a:srgbClr val="9DDADD"/>
@@ -1520,7 +1522,7 @@
                 <a:ea typeface="Arial"/>
                 <a:cs typeface="Arial"/>
               </a:rPr>
-              <a:t>An eight-session MechaRAMS proposal for grades 7 and 8</a:t>
+              <a:t>Eight robotics sessions for 12 children in grades 5 and 6</a:t>
             </a:r>
           </a:p>
         </p:txBody>
@@ -1559,6 +1561,7 @@
           <a:lstStyle xmlns:a="http://schemas.openxmlformats.org/drawingml/2006/main"/>
           <a:p xmlns:a="http://schemas.openxmlformats.org/drawingml/2006/main">
             <a:pPr>
+              <a:buNone/>
               <a:defRPr sz="1425" b="0">
                 <a:solidFill>
                   <a:srgbClr val="B9D4DC"/>
@@ -1645,6 +1648,7 @@
           <a:lstStyle xmlns:a="http://schemas.openxmlformats.org/drawingml/2006/main"/>
           <a:p xmlns:a="http://schemas.openxmlformats.org/drawingml/2006/main">
             <a:pPr>
+              <a:buNone/>
               <a:defRPr sz="3600" b="1">
                 <a:solidFill>
                   <a:srgbClr val="173044"/>
@@ -1663,7 +1667,7 @@
                 <a:ea typeface="Arial"/>
                 <a:cs typeface="Arial"/>
               </a:rPr>
-              <a:t>The proposed pilot</a:t>
+              <a:t>The confirmed class format</a:t>
             </a:r>
           </a:p>
         </p:txBody>
@@ -1702,6 +1706,7 @@
           <a:lstStyle xmlns:a="http://schemas.openxmlformats.org/drawingml/2006/main"/>
           <a:p xmlns:a="http://schemas.openxmlformats.org/drawingml/2006/main">
             <a:pPr>
+              <a:buNone/>
               <a:defRPr sz="2325" b="0">
                 <a:solidFill>
                   <a:srgbClr val="173044"/>
@@ -1720,7 +1725,7 @@
                 <a:ea typeface="Arial"/>
                 <a:cs typeface="Arial"/>
               </a:rPr>
-              <a:t>8 students in four pairs</a:t>
+              <a:t>12 children in four teams of three</a:t>
             </a:r>
           </a:p>
         </p:txBody>
@@ -1759,6 +1764,7 @@
           <a:lstStyle xmlns:a="http://schemas.openxmlformats.org/drawingml/2006/main"/>
           <a:p xmlns:a="http://schemas.openxmlformats.org/drawingml/2006/main">
             <a:pPr>
+              <a:buNone/>
               <a:defRPr sz="2325" b="0">
                 <a:solidFill>
                   <a:srgbClr val="173044"/>
@@ -1777,7 +1783,7 @@
                 <a:ea typeface="Arial"/>
                 <a:cs typeface="Arial"/>
               </a:rPr>
-              <a:t>2 existing SPIKE Prime kits</a:t>
+              <a:t>2 SPIKE Prime kits and 4 available laptops</a:t>
             </a:r>
           </a:p>
         </p:txBody>
@@ -1816,6 +1822,7 @@
           <a:lstStyle xmlns:a="http://schemas.openxmlformats.org/drawingml/2006/main"/>
           <a:p xmlns:a="http://schemas.openxmlformats.org/drawingml/2006/main">
             <a:pPr>
+              <a:buNone/>
               <a:defRPr sz="2325" b="0">
                 <a:solidFill>
                   <a:srgbClr val="173044"/>
@@ -1873,6 +1880,7 @@
           <a:lstStyle xmlns:a="http://schemas.openxmlformats.org/drawingml/2006/main"/>
           <a:p xmlns:a="http://schemas.openxmlformats.org/drawingml/2006/main">
             <a:pPr>
+              <a:buNone/>
               <a:defRPr sz="2325" b="0">
                 <a:solidFill>
                   <a:srgbClr val="173044"/>
@@ -1891,7 +1899,7 @@
                 <a:ea typeface="Arial"/>
                 <a:cs typeface="Arial"/>
               </a:rPr>
-              <a:t>2 trained student mentors minimum, plus an adult lead</a:t>
+              <a:t>4–6 student instructors, plus an adult lead</a:t>
             </a:r>
           </a:p>
         </p:txBody>
@@ -1959,6 +1967,7 @@
           <a:lstStyle xmlns:a="http://schemas.openxmlformats.org/drawingml/2006/main"/>
           <a:p xmlns:a="http://schemas.openxmlformats.org/drawingml/2006/main">
             <a:pPr>
+              <a:buNone/>
               <a:defRPr sz="3600" b="1">
                 <a:solidFill>
                   <a:srgbClr val="173044"/>
@@ -2016,6 +2025,7 @@
           <a:lstStyle xmlns:a="http://schemas.openxmlformats.org/drawingml/2006/main"/>
           <a:p xmlns:a="http://schemas.openxmlformats.org/drawingml/2006/main">
             <a:pPr>
+              <a:buNone/>
               <a:defRPr sz="2250" b="0">
                 <a:solidFill>
                   <a:srgbClr val="173044"/>
@@ -2034,7 +2044,7 @@
                 <a:ea typeface="Arial"/>
                 <a:cs typeface="Arial"/>
               </a:rPr>
-              <a:t>Weeks 1–2   Signals, movement, and a measured delivery</a:t>
+              <a:t>Weeks 1–2   A robot mascot and a useful cargo tray</a:t>
             </a:r>
           </a:p>
         </p:txBody>
@@ -2073,6 +2083,7 @@
           <a:lstStyle xmlns:a="http://schemas.openxmlformats.org/drawingml/2006/main"/>
           <a:p xmlns:a="http://schemas.openxmlformats.org/drawingml/2006/main">
             <a:pPr>
+              <a:buNone/>
               <a:defRPr sz="2250" b="0">
                 <a:solidFill>
                   <a:srgbClr val="173044"/>
@@ -2091,7 +2102,7 @@
                 <a:ea typeface="Arial"/>
                 <a:cs typeface="Arial"/>
               </a:rPr>
-              <a:t>Weeks 3–4   Repeating routines and sensor decisions</a:t>
+              <a:t>Weeks 3–4   A dancing character and a garage</a:t>
             </a:r>
           </a:p>
         </p:txBody>
@@ -2130,6 +2141,7 @@
           <a:lstStyle xmlns:a="http://schemas.openxmlformats.org/drawingml/2006/main"/>
           <a:p xmlns:a="http://schemas.openxmlformats.org/drawingml/2006/main">
             <a:pPr>
+              <a:buNone/>
               <a:defRPr sz="2250" b="0">
                 <a:solidFill>
                   <a:srgbClr val="173044"/>
@@ -2148,7 +2160,7 @@
                 <a:ea typeface="Arial"/>
                 <a:cs typeface="Arial"/>
               </a:rPr>
-              <a:t>Weeks 5–6   Floor markers and a student-built attachment</a:t>
+              <a:t>Weeks 5–6   A marker road and a rescue guide</a:t>
             </a:r>
           </a:p>
         </p:txBody>
@@ -2187,6 +2199,7 @@
           <a:lstStyle xmlns:a="http://schemas.openxmlformats.org/drawingml/2006/main"/>
           <a:p xmlns:a="http://schemas.openxmlformats.org/drawingml/2006/main">
             <a:pPr>
+              <a:buNone/>
               <a:defRPr sz="2250" b="0">
                 <a:solidFill>
                   <a:srgbClr val="173044"/>
@@ -2205,7 +2218,7 @@
                 <a:ea typeface="Arial"/>
                 <a:cs typeface="Arial"/>
               </a:rPr>
-              <a:t>Weeks 7–8   A community mission and family showcase</a:t>
+              <a:t>Weeks 7–8   A community scene and working exhibit</a:t>
             </a:r>
           </a:p>
         </p:txBody>
@@ -2273,6 +2286,7 @@
           <a:lstStyle xmlns:a="http://schemas.openxmlformats.org/drawingml/2006/main"/>
           <a:p xmlns:a="http://schemas.openxmlformats.org/drawingml/2006/main">
             <a:pPr>
+              <a:buNone/>
               <a:defRPr sz="3600" b="1">
                 <a:solidFill>
                   <a:srgbClr val="FFFFFF"/>
@@ -2291,7 +2305,7 @@
                 <a:ea typeface="Arial"/>
                 <a:cs typeface="Arial"/>
               </a:rPr>
-              <a:t>Python students can reason about</a:t>
+              <a:t>A small recipe controls the robot</a:t>
             </a:r>
           </a:p>
         </p:txBody>
@@ -2330,6 +2344,7 @@
           <a:lstStyle xmlns:a="http://schemas.openxmlformats.org/drawingml/2006/main"/>
           <a:p xmlns:a="http://schemas.openxmlformats.org/drawingml/2006/main">
             <a:pPr>
+              <a:buNone/>
               <a:defRPr sz="2925" b="0">
                 <a:solidFill>
                   <a:srgbClr val="FFFFFF"/>
@@ -2353,6 +2368,7 @@
           </a:p>
           <a:p xmlns:a="http://schemas.openxmlformats.org/drawingml/2006/main">
             <a:pPr>
+              <a:buNone/>
               <a:defRPr sz="2925" b="0">
                 <a:solidFill>
                   <a:srgbClr val="FFFFFF"/>
@@ -2376,6 +2392,7 @@
           </a:p>
           <a:p xmlns:a="http://schemas.openxmlformats.org/drawingml/2006/main">
             <a:pPr>
+              <a:buNone/>
               <a:defRPr sz="2925" b="0">
                 <a:solidFill>
                   <a:srgbClr val="FFFFFF"/>
@@ -2433,6 +2450,7 @@
           <a:lstStyle xmlns:a="http://schemas.openxmlformats.org/drawingml/2006/main"/>
           <a:p xmlns:a="http://schemas.openxmlformats.org/drawingml/2006/main">
             <a:pPr>
+              <a:buNone/>
               <a:defRPr sz="2325" b="0">
                 <a:solidFill>
                   <a:srgbClr val="9DDADD"/>
@@ -2519,6 +2537,7 @@
           <a:lstStyle xmlns:a="http://schemas.openxmlformats.org/drawingml/2006/main"/>
           <a:p xmlns:a="http://schemas.openxmlformats.org/drawingml/2006/main">
             <a:pPr>
+              <a:buNone/>
               <a:defRPr sz="3600" b="1">
                 <a:solidFill>
                   <a:srgbClr val="173044"/>
@@ -2537,7 +2556,7 @@
                 <a:ea typeface="Arial"/>
                 <a:cs typeface="Arial"/>
               </a:rPr>
-              <a:t>The decisions before registration</a:t>
+              <a:t>Preparation before the first class</a:t>
             </a:r>
           </a:p>
         </p:txBody>
@@ -2576,6 +2595,7 @@
           <a:lstStyle xmlns:a="http://schemas.openxmlformats.org/drawingml/2006/main"/>
           <a:p xmlns:a="http://schemas.openxmlformats.org/drawingml/2006/main">
             <a:pPr>
+              <a:buNone/>
               <a:defRPr sz="2250" b="0">
                 <a:solidFill>
                   <a:srgbClr val="173044"/>
@@ -2594,7 +2614,7 @@
                 <a:ea typeface="Arial"/>
                 <a:cs typeface="Arial"/>
               </a:rPr>
-              <a:t>Confirm enrollment, devices, and eight meeting dates.</a:t>
+              <a:t>Confirm eight dates and test the available devices.</a:t>
             </a:r>
           </a:p>
         </p:txBody>
@@ -2633,6 +2653,7 @@
           <a:lstStyle xmlns:a="http://schemas.openxmlformats.org/drawingml/2006/main"/>
           <a:p xmlns:a="http://schemas.openxmlformats.org/drawingml/2006/main">
             <a:pPr>
+              <a:buNone/>
               <a:defRPr sz="2250" b="0">
                 <a:solidFill>
                   <a:srgbClr val="173044"/>
@@ -2690,6 +2711,7 @@
           <a:lstStyle xmlns:a="http://schemas.openxmlformats.org/drawingml/2006/main"/>
           <a:p xmlns:a="http://schemas.openxmlformats.org/drawingml/2006/main">
             <a:pPr>
+              <a:buNone/>
               <a:defRPr sz="2250" b="0">
                 <a:solidFill>
                   <a:srgbClr val="173044"/>
@@ -2747,6 +2769,7 @@
           <a:lstStyle xmlns:a="http://schemas.openxmlformats.org/drawingml/2006/main"/>
           <a:p xmlns:a="http://schemas.openxmlformats.org/drawingml/2006/main">
             <a:pPr>
+              <a:buNone/>
               <a:defRPr sz="2250" b="0">
                 <a:solidFill>
                   <a:srgbClr val="173044"/>
@@ -2833,6 +2856,7 @@
           <a:lstStyle xmlns:a="http://schemas.openxmlformats.org/drawingml/2006/main"/>
           <a:p xmlns:a="http://schemas.openxmlformats.org/drawingml/2006/main">
             <a:pPr>
+              <a:buNone/>
               <a:defRPr sz="3600" b="1">
                 <a:solidFill>
                   <a:srgbClr val="173044"/>
@@ -2890,6 +2914,7 @@
           <a:lstStyle xmlns:a="http://schemas.openxmlformats.org/drawingml/2006/main"/>
           <a:p xmlns:a="http://schemas.openxmlformats.org/drawingml/2006/main">
             <a:pPr>
+              <a:buNone/>
               <a:defRPr sz="2250" b="0">
                 <a:solidFill>
                   <a:srgbClr val="173044"/>
@@ -2947,6 +2972,7 @@
           <a:lstStyle xmlns:a="http://schemas.openxmlformats.org/drawingml/2006/main"/>
           <a:p xmlns:a="http://schemas.openxmlformats.org/drawingml/2006/main">
             <a:pPr>
+              <a:buNone/>
               <a:defRPr sz="2250" b="0">
                 <a:solidFill>
                   <a:srgbClr val="173044"/>
@@ -2965,7 +2991,7 @@
                 <a:ea typeface="Arial"/>
                 <a:cs typeface="Arial"/>
               </a:rPr>
-              <a:t>Each pair improves a design using test evidence.</a:t>
+              <a:t>Each team improves a design using test evidence.</a:t>
             </a:r>
           </a:p>
         </p:txBody>
@@ -3004,6 +3030,7 @@
           <a:lstStyle xmlns:a="http://schemas.openxmlformats.org/drawingml/2006/main"/>
           <a:p xmlns:a="http://schemas.openxmlformats.org/drawingml/2006/main">
             <a:pPr>
+              <a:buNone/>
               <a:defRPr sz="2250" b="0">
                 <a:solidFill>
                   <a:srgbClr val="173044"/>
@@ -3061,6 +3088,7 @@
           <a:lstStyle xmlns:a="http://schemas.openxmlformats.org/drawingml/2006/main"/>
           <a:p xmlns:a="http://schemas.openxmlformats.org/drawingml/2006/main">
             <a:pPr>
+              <a:buNone/>
               <a:defRPr sz="2250" b="0">
                 <a:solidFill>
                   <a:srgbClr val="173044"/>
